--- a/media/exports/reports/2026-01/people-helped.pptx
+++ b/media/exports/reports/2026-01/people-helped.pptx
@@ -164,7 +164,7 @@
             <c:idx val="2"/>
             <c:spPr>
               <a:solidFill>
-                <a:srgbClr val="7D8790"/>
+                <a:srgbClr val="0E9F6E"/>
               </a:solidFill>
             </c:spPr>
           </c:dPt>
@@ -185,13 +185,13 @@
                   <c:v>Community meals</c:v>
                 </c:pt>
                 <c:pt idx="1">
-                  <c:v>Youth outreach</c:v>
+                  <c:v>Housing support</c:v>
                 </c:pt>
                 <c:pt idx="2">
-                  <c:v>Housing support</c:v>
+                  <c:v>Digital literacy</c:v>
                 </c:pt>
                 <c:pt idx="3">
-                  <c:v>Digital literacy</c:v>
+                  <c:v>Youth outreach</c:v>
                 </c:pt>
               </c:strCache>
             </c:strRef>
@@ -203,16 +203,16 @@
                 <c:formatCode>0.0"%";[Red](0.0"%")</c:formatCode>
                 <c:ptCount val="4"/>
                 <c:pt idx="0">
-                  <c:v>84.0</c:v>
+                  <c:v>88.4</c:v>
                 </c:pt>
                 <c:pt idx="1">
-                  <c:v>85.7</c:v>
+                  <c:v>89.1</c:v>
                 </c:pt>
                 <c:pt idx="2">
-                  <c:v>87.5</c:v>
+                  <c:v>90.4</c:v>
                 </c:pt>
                 <c:pt idx="3">
-                  <c:v>92.2</c:v>
+                  <c:v>91.9</c:v>
                 </c:pt>
               </c:numCache>
             </c:numRef>
@@ -276,7 +276,7 @@
       <c:valAx>
         <c:axId val="-2113994440"/>
         <c:scaling>
-          <c:max val="106.03"/>
+          <c:max val="105.685"/>
           <c:min val="0.0"/>
         </c:scaling>
         <c:delete/>
@@ -1037,7 +1037,7 @@
           <a:lstStyle/>
           <a:p>
             <a:r>
-              <a:t>How many people did we help this month, and how many couldn't we reach?. People helped, January: 427; Couldn't reach, January: 69; Share reached, January: 86.1%. 427 people were helped in January, and 69 came to a program but couldn't be helped: 86.1% reached (target 90.0%), against 90.5% in December. Community meals reached the smallest share: 84.0% (32 couldn't be helped). The main reason: program at capacity (26 people).</a:t>
+              <a:t>How many people did we help this month, and how many couldn't we reach?. People helped, January: 427; Couldn't reach, January: 49; Share reached, January: 89.7%. 427 people were helped in January, and 49 came to a program but couldn't be helped: 89.7% reached (target 90.0%), against 92.4% in December. Community meals reached the smallest share: 88.4% (22 couldn't be helped). The main reason: program at capacity (20 people).</a:t>
             </a:r>
           </a:p>
         </p:txBody>
@@ -4592,7 +4592,7 @@
                 </a:solidFill>
                 <a:latin typeface="Roboto"/>
               </a:rPr>
-              <a:t>Data retrieved 2pm, Tue 6 Oct 2026 · Generated 8 Oct 2026, 6:29pm · Sample data · Made with Python (python-pptx)</a:t>
+              <a:t>Data retrieved 2pm, Tue 6 Oct 2026 · Generated 8 Oct 2026, 11:41pm · Sample data · Made with Python (python-pptx)</a:t>
             </a:r>
           </a:p>
         </p:txBody>
@@ -5104,7 +5104,7 @@
                 </a:solidFill>
                 <a:latin typeface="Roboto"/>
               </a:rPr>
-              <a:t>69</a:t>
+              <a:t>49</a:t>
             </a:r>
           </a:p>
         </p:txBody>
@@ -5143,7 +5143,7 @@
                 </a:solidFill>
                 <a:latin typeface="Roboto"/>
               </a:rPr>
-              <a:t>December 55</a:t>
+              <a:t>December 43</a:t>
             </a:r>
           </a:p>
         </p:txBody>
@@ -5266,11 +5266,11 @@
             <a:r>
               <a:rPr sz="2200" b="1">
                 <a:solidFill>
-                  <a:srgbClr val="B42318"/>
+                  <a:srgbClr val="8A6D3B"/>
                 </a:solidFill>
                 <a:latin typeface="Roboto"/>
               </a:rPr>
-              <a:t>86.1%</a:t>
+              <a:t>89.7%</a:t>
             </a:r>
           </a:p>
         </p:txBody>
@@ -5340,7 +5340,7 @@
         </p:nvCxnSpPr>
         <p:spPr>
           <a:xfrm>
-            <a:off x="9392353" y="2611587"/>
+            <a:off x="9410476" y="2611587"/>
             <a:ext cx="0" cy="1995586"/>
           </a:xfrm>
           <a:prstGeom prst="line">
@@ -5376,7 +5376,7 @@
         </p:nvSpPr>
         <p:spPr>
           <a:xfrm>
-            <a:off x="8295073" y="4607173"/>
+            <a:off x="8313196" y="4607173"/>
             <a:ext cx="2194560" cy="237744"/>
           </a:xfrm>
           <a:prstGeom prst="rect">
@@ -5529,7 +5529,7 @@
                 </a:solidFill>
                 <a:latin typeface="Roboto"/>
               </a:rPr>
-              <a:t>427 people were helped in January, and 69 came to a program but couldn't be helped: 86.1% reached (target 90.0%), against 90.5% in December.</a:t>
+              <a:t>427 people were helped in January, and 49 came to a program but couldn't be helped: 89.7% reached (target 90.0%), against 92.4% in December.</a:t>
             </a:r>
           </a:p>
         </p:txBody>
@@ -5656,7 +5656,7 @@
                 </a:solidFill>
                 <a:latin typeface="Roboto"/>
               </a:rPr>
-              <a:t>Community meals reached the smallest share: 84.0% (32 couldn't be helped). The main reason: program at capacity (26 people).</a:t>
+              <a:t>Community meals reached the smallest share: 88.4% (22 couldn't be helped). The main reason: program at capacity (20 people).</a:t>
             </a:r>
           </a:p>
         </p:txBody>
@@ -5734,7 +5734,7 @@
                 </a:solidFill>
                 <a:latin typeface="Roboto"/>
               </a:rPr>
-              <a:t>Data retrieved 2pm, Tue 6 Oct 2026 · Generated 8 Oct 2026, 6:29pm · Sample data · Made with Python (python-pptx)</a:t>
+              <a:t>Data retrieved 2pm, Tue 6 Oct 2026 · Generated 8 Oct 2026, 11:41pm · Sample data · Made with Python (python-pptx)</a:t>
             </a:r>
           </a:p>
         </p:txBody>
@@ -6049,7 +6049,7 @@
                 </a:solidFill>
                 <a:latin typeface="Roboto"/>
               </a:rPr>
-              <a:t>Data retrieved 2pm, Tue 6 Oct 2026 · Generated 8 Oct 2026, 6:29pm · Sample data · Made with Python (python-pptx)</a:t>
+              <a:t>Data retrieved 2pm, Tue 6 Oct 2026 · Generated 8 Oct 2026, 11:41pm · Sample data · Made with Python (python-pptx)</a:t>
             </a:r>
           </a:p>
         </p:txBody>
@@ -6244,7 +6244,7 @@
         </p:nvGraphicFramePr>
         <p:xfrm>
           <a:off x="457200" y="960120"/>
-          <a:ext cx="11277295" cy="1865376"/>
+          <a:ext cx="11277295" cy="1554480"/>
         </p:xfrm>
         <a:graphic>
           <a:graphicData uri="http://schemas.openxmlformats.org/drawingml/2006/table">
@@ -6357,7 +6357,7 @@
                           </a:solidFill>
                           <a:latin typeface="Roboto"/>
                         </a:rPr>
-                        <a:t>26</a:t>
+                        <a:t>20</a:t>
                       </a:r>
                     </a:p>
                   </a:txBody>
@@ -6413,118 +6413,6 @@
                           </a:solidFill>
                           <a:latin typeface="Roboto"/>
                         </a:rPr>
-                        <a:t>13</a:t>
-                      </a:r>
-                    </a:p>
-                  </a:txBody>
-                  <a:tcPr>
-                    <a:solidFill>
-                      <a:srgbClr val="F7FAF7"/>
-                    </a:solidFill>
-                  </a:tcPr>
-                </a:tc>
-              </a:tr>
-              <a:tr h="310896">
-                <a:tc>
-                  <a:txBody>
-                    <a:bodyPr/>
-                    <a:lstStyle/>
-                    <a:p>
-                      <a:pPr algn="l">
-                        <a:defRPr>
-                          <a:latin typeface="Roboto"/>
-                        </a:defRPr>
-                      </a:pPr>
-                      <a:r>
-                        <a:rPr sz="1050">
-                          <a:solidFill>
-                            <a:srgbClr val="25342A"/>
-                          </a:solidFill>
-                          <a:latin typeface="Roboto"/>
-                        </a:rPr>
-                        <a:t>Couldn't make contact</a:t>
-                      </a:r>
-                    </a:p>
-                  </a:txBody>
-                  <a:tcPr>
-                    <a:solidFill>
-                      <a:srgbClr val="FFFFFF"/>
-                    </a:solidFill>
-                  </a:tcPr>
-                </a:tc>
-                <a:tc>
-                  <a:txBody>
-                    <a:bodyPr/>
-                    <a:lstStyle/>
-                    <a:p>
-                      <a:pPr algn="r">
-                        <a:defRPr>
-                          <a:latin typeface="Roboto"/>
-                        </a:defRPr>
-                      </a:pPr>
-                      <a:r>
-                        <a:rPr sz="1050">
-                          <a:solidFill>
-                            <a:srgbClr val="25342A"/>
-                          </a:solidFill>
-                          <a:latin typeface="Roboto"/>
-                        </a:rPr>
-                        <a:t>12</a:t>
-                      </a:r>
-                    </a:p>
-                  </a:txBody>
-                  <a:tcPr>
-                    <a:solidFill>
-                      <a:srgbClr val="FFFFFF"/>
-                    </a:solidFill>
-                  </a:tcPr>
-                </a:tc>
-              </a:tr>
-              <a:tr h="310896">
-                <a:tc>
-                  <a:txBody>
-                    <a:bodyPr/>
-                    <a:lstStyle/>
-                    <a:p>
-                      <a:pPr algn="l">
-                        <a:defRPr>
-                          <a:latin typeface="Roboto"/>
-                        </a:defRPr>
-                      </a:pPr>
-                      <a:r>
-                        <a:rPr sz="1050">
-                          <a:solidFill>
-                            <a:srgbClr val="25342A"/>
-                          </a:solidFill>
-                          <a:latin typeface="Roboto"/>
-                        </a:rPr>
-                        <a:t>Not eligible</a:t>
-                      </a:r>
-                    </a:p>
-                  </a:txBody>
-                  <a:tcPr>
-                    <a:solidFill>
-                      <a:srgbClr val="F7FAF7"/>
-                    </a:solidFill>
-                  </a:tcPr>
-                </a:tc>
-                <a:tc>
-                  <a:txBody>
-                    <a:bodyPr/>
-                    <a:lstStyle/>
-                    <a:p>
-                      <a:pPr algn="r">
-                        <a:defRPr>
-                          <a:latin typeface="Roboto"/>
-                        </a:defRPr>
-                      </a:pPr>
-                      <a:r>
-                        <a:rPr sz="1050">
-                          <a:solidFill>
-                            <a:srgbClr val="25342A"/>
-                          </a:solidFill>
-                          <a:latin typeface="Roboto"/>
-                        </a:rPr>
                         <a:t>11</a:t>
                       </a:r>
                     </a:p>
@@ -6554,7 +6442,7 @@
                           </a:solidFill>
                           <a:latin typeface="Roboto"/>
                         </a:rPr>
-                        <a:t>Outside the service area</a:t>
+                        <a:t>Not eligible</a:t>
                       </a:r>
                     </a:p>
                   </a:txBody>
@@ -6581,7 +6469,7 @@
                           </a:solidFill>
                           <a:latin typeface="Roboto"/>
                         </a:rPr>
-                        <a:t>7</a:t>
+                        <a:t>10</a:t>
                       </a:r>
                     </a:p>
                   </a:txBody>
@@ -6592,6 +6480,62 @@
                   </a:tcPr>
                 </a:tc>
               </a:tr>
+              <a:tr h="310896">
+                <a:tc>
+                  <a:txBody>
+                    <a:bodyPr/>
+                    <a:lstStyle/>
+                    <a:p>
+                      <a:pPr algn="l">
+                        <a:defRPr>
+                          <a:latin typeface="Roboto"/>
+                        </a:defRPr>
+                      </a:pPr>
+                      <a:r>
+                        <a:rPr sz="1050">
+                          <a:solidFill>
+                            <a:srgbClr val="25342A"/>
+                          </a:solidFill>
+                          <a:latin typeface="Roboto"/>
+                        </a:rPr>
+                        <a:t>Couldn't make contact</a:t>
+                      </a:r>
+                    </a:p>
+                  </a:txBody>
+                  <a:tcPr>
+                    <a:solidFill>
+                      <a:srgbClr val="F7FAF7"/>
+                    </a:solidFill>
+                  </a:tcPr>
+                </a:tc>
+                <a:tc>
+                  <a:txBody>
+                    <a:bodyPr/>
+                    <a:lstStyle/>
+                    <a:p>
+                      <a:pPr algn="r">
+                        <a:defRPr>
+                          <a:latin typeface="Roboto"/>
+                        </a:defRPr>
+                      </a:pPr>
+                      <a:r>
+                        <a:rPr sz="1050">
+                          <a:solidFill>
+                            <a:srgbClr val="25342A"/>
+                          </a:solidFill>
+                          <a:latin typeface="Roboto"/>
+                        </a:rPr>
+                        <a:t>8</a:t>
+                      </a:r>
+                    </a:p>
+                  </a:txBody>
+                  <a:tcPr>
+                    <a:solidFill>
+                      <a:srgbClr val="F7FAF7"/>
+                    </a:solidFill>
+                  </a:tcPr>
+                </a:tc>
+              </a:tr>
             </a:tbl>
           </a:graphicData>
         </a:graphic>
@@ -6669,7 +6613,7 @@
                 </a:solidFill>
                 <a:latin typeface="Roboto"/>
               </a:rPr>
-              <a:t>Data retrieved 2pm, Tue 6 Oct 2026 · Generated 8 Oct 2026, 6:29pm · Sample data · Made with Python (python-pptx)</a:t>
+              <a:t>Data retrieved 2pm, Tue 6 Oct 2026 · Generated 8 Oct 2026, 11:41pm · Sample data · Made with Python (python-pptx)</a:t>
             </a:r>
           </a:p>
         </p:txBody>

--- a/media/exports/reports/2026-01/people-helped.pptx
+++ b/media/exports/reports/2026-01/people-helped.pptx
@@ -967,7 +967,7 @@
           <a:lstStyle/>
           <a:p>
             <a:r>
-              <a:t>How many people did we help this month, and how many couldn't we reach?. Sample Community Services Ltd. Period: January 2026. People helped by each program, day by day, and the people who came to a program but couldn't be helped (and why). People helped are counted against each program's own grant spend.</a:t>
+              <a:t>How many people did we help this month, and how many couldn't we reach?. Sample Community Services Ltd. Period: January 2026. In short: 427 people helped in January; 49 couldn't be reached (89.7% reached, target 90.0%). People helped by each program, day by day, and the people who came to a program but couldn't be helped (and why). People helped are counted against each program's own grant spend.</a:t>
             </a:r>
           </a:p>
         </p:txBody>
@@ -4402,7 +4402,7 @@
         <p:spPr>
           <a:xfrm>
             <a:off x="457200" y="3703320"/>
-            <a:ext cx="11277295" cy="535940"/>
+            <a:ext cx="11277295" cy="758190"/>
           </a:xfrm>
           <a:prstGeom prst="rect">
             <a:avLst/>
@@ -4427,7 +4427,7 @@
                 </a:solidFill>
                 <a:latin typeface="Roboto"/>
               </a:rPr>
-              <a:t>Period: January 2026. People helped by each program, day by day, and the people who came to a program but couldn't be helped (and why). People helped are counted against each program's own grant spend.</a:t>
+              <a:t>Period: January 2026. In short: 427 people helped in January; 49 couldn't be reached (89.7% reached, target 90.0%). People helped by each program, day by day, and the people who came to a program but couldn't be helped (and why). People helped are counted against each program's own grant spend.</a:t>
             </a:r>
           </a:p>
         </p:txBody>
@@ -4440,7 +4440,7 @@
         </p:nvSpPr>
         <p:spPr>
           <a:xfrm>
-            <a:off x="457200" y="4330700"/>
+            <a:off x="457200" y="4552950"/>
             <a:ext cx="11277295" cy="1097280"/>
           </a:xfrm>
           <a:prstGeom prst="rect">
@@ -4592,7 +4592,7 @@
                 </a:solidFill>
                 <a:latin typeface="Roboto"/>
               </a:rPr>
-              <a:t>Data retrieved 2pm, Tue 6 Oct 2026 · Generated 8 Oct 2026, 11:41pm · Sample data · Made with Python (python-pptx)</a:t>
+              <a:t>Data retrieved 2pm, Tue 6 Oct 2026 · Generated 10 Oct 2026, 9:55pm · Sample data · Made with Python (python-pptx)</a:t>
             </a:r>
           </a:p>
         </p:txBody>
@@ -5734,7 +5734,7 @@
                 </a:solidFill>
                 <a:latin typeface="Roboto"/>
               </a:rPr>
-              <a:t>Data retrieved 2pm, Tue 6 Oct 2026 · Generated 8 Oct 2026, 11:41pm · Sample data · Made with Python (python-pptx)</a:t>
+              <a:t>Data retrieved 2pm, Tue 6 Oct 2026 · Generated 10 Oct 2026, 9:55pm · Sample data · Made with Python (python-pptx)</a:t>
             </a:r>
           </a:p>
         </p:txBody>
@@ -6049,7 +6049,7 @@
                 </a:solidFill>
                 <a:latin typeface="Roboto"/>
               </a:rPr>
-              <a:t>Data retrieved 2pm, Tue 6 Oct 2026 · Generated 8 Oct 2026, 11:41pm · Sample data · Made with Python (python-pptx)</a:t>
+              <a:t>Data retrieved 2pm, Tue 6 Oct 2026 · Generated 10 Oct 2026, 9:55pm · Sample data · Made with Python (python-pptx)</a:t>
             </a:r>
           </a:p>
         </p:txBody>
@@ -6613,7 +6613,7 @@
                 </a:solidFill>
                 <a:latin typeface="Roboto"/>
               </a:rPr>
-              <a:t>Data retrieved 2pm, Tue 6 Oct 2026 · Generated 8 Oct 2026, 11:41pm · Sample data · Made with Python (python-pptx)</a:t>
+              <a:t>Data retrieved 2pm, Tue 6 Oct 2026 · Generated 10 Oct 2026, 9:55pm · Sample data · Made with Python (python-pptx)</a:t>
             </a:r>
           </a:p>
         </p:txBody>
